--- a/decks/triple-light/triple-light_ch4_lenses.pptx
+++ b/decks/triple-light/triple-light_ch4_lenses.pptx
@@ -126,30 +126,30 @@
   <p:extLst>
     <p:ext uri="{521415D9-36F7-43E2-AB2F-B90AF26B5E84}">
       <p14:sectionLst xmlns:p14="http://schemas.microsoft.com/office/powerpoint/2010/main">
-        <p14:section name="Opening" id="{afde9ccc-9e63-e10d-0d4c-7df9c90a0308}">
+        <p14:section name="Opening" id="{fb54dadf-0dbe-2141-946f-a114794004ed}">
           <p14:sldIdLst>
             <p14:sldId id="256"/>
           </p14:sldIdLst>
         </p14:section>
-        <p14:section name="Gate" id="{cff4eece-2d51-d69c-e1cb-adf273be891c}">
+        <p14:section name="Gate" id="{3b435172-897b-d379-e9f2-32669e1aea92}">
           <p14:sldIdLst>
             <p14:sldId id="257"/>
             <p14:sldId id="258"/>
           </p14:sldIdLst>
         </p14:section>
-        <p14:section name="Pre-teach" id="{d1c81dff-0c58-4b8b-6bfd-9e1b46b2f03e}">
+        <p14:section name="Pre-teach" id="{1db9687e-49a0-07de-4bd3-ba28ba6e02db}">
           <p14:sldIdLst>
             <p14:sldId id="259"/>
             <p14:sldId id="260"/>
           </p14:sldIdLst>
         </p14:section>
-        <p14:section name="Read-along" id="{9e09f94d-1691-41bb-1337-1a464e33371f}">
+        <p14:section name="Read-along" id="{a1f21849-54a7-b2db-7423-3d474139059c}">
           <p14:sldIdLst>
             <p14:sldId id="261"/>
             <p14:sldId id="262"/>
           </p14:sldIdLst>
         </p14:section>
-        <p14:section name="Teach" id="{107c0f87-9f23-ab2a-210c-e990a4f99a56}">
+        <p14:section name="Teach" id="{927f23c8-a79a-b5ee-cb6a-86dd08dd9aad}">
           <p14:sldIdLst>
             <p14:sldId id="263"/>
             <p14:sldId id="264"/>
@@ -158,7 +158,7 @@
             <p14:sldId id="267"/>
           </p14:sldIdLst>
         </p14:section>
-        <p14:section name="Routes" id="{ded692e4-bde9-02cd-758c-71fa9c57cee5}">
+        <p14:section name="Routes" id="{c131860b-cec4-8434-1b77-8be311ab8368}">
           <p14:sldIdLst>
             <p14:sldId id="268"/>
             <p14:sldId id="269"/>
@@ -166,12 +166,12 @@
             <p14:sldId id="271"/>
           </p14:sldIdLst>
         </p14:section>
-        <p14:section name="Close" id="{90cc744a-84e3-0b3c-26c5-6796f38bf94c}">
+        <p14:section name="Close" id="{f9085560-89df-872a-c292-92c28c703acf}">
           <p14:sldIdLst>
             <p14:sldId id="272"/>
           </p14:sldIdLst>
         </p14:section>
-        <p14:section name="Answers" id="{7765ea49-c2b8-4fd9-e07e-44a879898f9d}">
+        <p14:section name="Answers" id="{a4d1056b-7f90-bbbc-5377-bf8f021e6c59}">
           <p14:sldIdLst>
             <p14:sldId id="273"/>
             <p14:sldId id="274"/>
@@ -1603,7 +1603,7 @@
               <a:t>Do now — retrieval. Silent, no notes, no help: recall comes before any support. Give about four minutes.
 1. What does a convex lens do to rays of light that arrive parallel to its axis?  →  A   Brings them together at the principal focus
 2. The distance from the centre of a lens to its principal focus is called the ___.  →  focal length
-3. What kind of image does a concave lens form?  →  A   Always a virtual image
+3. What kind of image does a concave lens form?  →  D   Always a virtual image
 Circulate: who gets 3/3 (Stretch route), 2/3 (Core), 0–1 (Support)? Use this to route pupils later in the lesson.</a:t>
             </a:r>
             <a:endParaRPr lang="en-US" dirty="0"/>
@@ -1786,7 +1786,7 @@
               <a:t>Answers — pupils mark their own in a different colour, then hands up for 3/3, 2/3, 1/3.
 1. A   Brings them together at the principal focus. A convex (converging) lens refracts parallel rays so that they meet at the principal focus.
 2. focal length. Focal length is the distance from the lens to the principal focus. It is marked the same on both sides in a ray diagram.
-3. A   Always a virtual image. A concave lens diverges the rays, so they never meet after the lens. The image is always virtual, upright and smaller.
+3. D   Always a virtual image. A concave lens diverges the rays, so they never meet after the lens. The image is always virtual, upright and smaller.
 Say the route each score points to: 3/3 Stretch, 2/3 Core, 0–1 Support. Pupils may choose to move up.</a:t>
             </a:r>
             <a:endParaRPr lang="en-US" dirty="0"/>
@@ -6301,7 +6301,7 @@
                 <a:ea typeface="Calibri" pitchFamily="34" charset="-122"/>
                 <a:cs typeface="Calibri" pitchFamily="34" charset="-120"/>
               </a:rPr>
-              <a:t>Real, inverted and magnified</a:t>
+              <a:t>Virtual, upright and smaller</a:t>
             </a:r>
             <a:endParaRPr lang="en-US" sz="2600" dirty="0"/>
           </a:p>
@@ -6375,7 +6375,7 @@
                 <a:ea typeface="Calibri" pitchFamily="34" charset="-122"/>
                 <a:cs typeface="Calibri" pitchFamily="34" charset="-120"/>
               </a:rPr>
-              <a:t>Virtual, upright and smaller</a:t>
+              <a:t>Real, inverted and magnified</a:t>
             </a:r>
             <a:endParaRPr lang="en-US" sz="2600" dirty="0"/>
           </a:p>
@@ -10099,7 +10099,7 @@
                 <a:ea typeface="Calibri" pitchFamily="34" charset="-122"/>
                 <a:cs typeface="Calibri" pitchFamily="34" charset="-120"/>
               </a:rPr>
-              <a:t>Spreads them out as if they came from the principal focus</a:t>
+              <a:t>Lets them pass through without changing direction</a:t>
             </a:r>
             <a:endParaRPr lang="en-US" sz="2400" dirty="0"/>
           </a:p>
@@ -10136,7 +10136,7 @@
                 <a:ea typeface="Calibri" pitchFamily="34" charset="-122"/>
                 <a:cs typeface="Calibri" pitchFamily="34" charset="-120"/>
               </a:rPr>
-              <a:t>Reflects them back the way they came</a:t>
+              <a:t>Spreads them out as if they came from the principal focus</a:t>
             </a:r>
             <a:endParaRPr lang="en-US" sz="2400" dirty="0"/>
           </a:p>
@@ -10173,7 +10173,7 @@
                 <a:ea typeface="Calibri" pitchFamily="34" charset="-122"/>
                 <a:cs typeface="Calibri" pitchFamily="34" charset="-120"/>
               </a:rPr>
-              <a:t>Lets them pass through without changing direction</a:t>
+              <a:t>Reflects them back the way they came</a:t>
             </a:r>
             <a:endParaRPr lang="en-US" sz="2400" dirty="0"/>
           </a:p>
@@ -11674,7 +11674,7 @@
               <a:buNone/>
             </a:pPr>
             <a:r>
-              <a:rPr lang="en-US" sz="2200" b="1" dirty="0">
+              <a:rPr lang="en-US" sz="2000" b="1" dirty="0">
                 <a:solidFill>
                   <a:srgbClr val="1E2229"/>
                 </a:solidFill>
@@ -11684,17 +11684,17 @@
               </a:rPr>
               <a:t>What does a convex lens do to rays of light that arrive parallel to its axis?</a:t>
             </a:r>
-            <a:endParaRPr lang="en-US" sz="2200" dirty="0"/>
+            <a:endParaRPr lang="en-US" sz="2000" dirty="0"/>
           </a:p>
           <a:p>
             <a:pPr algn="l" indent="0" marL="0">
               <a:spcAft>
-                <a:spcPts val="200"/>
+                <a:spcPts val="600"/>
               </a:spcAft>
               <a:buNone/>
             </a:pPr>
             <a:r>
-              <a:rPr lang="en-US" sz="2200" b="1" dirty="0">
+              <a:rPr lang="en-US" sz="2000" b="1" dirty="0">
                 <a:solidFill>
                   <a:srgbClr val="B8862B"/>
                 </a:solidFill>
@@ -11706,12 +11706,12 @@
             </a:r>
             <a:pPr algn="l" indent="0" marL="0">
               <a:spcAft>
-                <a:spcPts val="200"/>
+                <a:spcPts val="600"/>
               </a:spcAft>
               <a:buNone/>
             </a:pPr>
             <a:r>
-              <a:rPr lang="en-US" sz="2200" dirty="0">
+              <a:rPr lang="en-US" sz="2000" dirty="0">
                 <a:solidFill>
                   <a:srgbClr val="1E2229"/>
                 </a:solidFill>
@@ -11721,17 +11721,17 @@
               </a:rPr>
               <a:t>Brings them together at the principal focus</a:t>
             </a:r>
-            <a:endParaRPr lang="en-US" sz="2200" dirty="0"/>
+            <a:endParaRPr lang="en-US" sz="2000" dirty="0"/>
           </a:p>
           <a:p>
             <a:pPr algn="l" indent="0" marL="0">
               <a:spcAft>
-                <a:spcPts val="200"/>
+                <a:spcPts val="600"/>
               </a:spcAft>
               <a:buNone/>
             </a:pPr>
             <a:r>
-              <a:rPr lang="en-US" sz="2200" b="1" dirty="0">
+              <a:rPr lang="en-US" sz="2000" b="1" dirty="0">
                 <a:solidFill>
                   <a:srgbClr val="B8862B"/>
                 </a:solidFill>
@@ -11743,12 +11743,12 @@
             </a:r>
             <a:pPr algn="l" indent="0" marL="0">
               <a:spcAft>
-                <a:spcPts val="200"/>
+                <a:spcPts val="600"/>
               </a:spcAft>
               <a:buNone/>
             </a:pPr>
             <a:r>
-              <a:rPr lang="en-US" sz="2200" dirty="0">
+              <a:rPr lang="en-US" sz="2000" dirty="0">
                 <a:solidFill>
                   <a:srgbClr val="1E2229"/>
                 </a:solidFill>
@@ -11756,19 +11756,56 @@
                 <a:ea typeface="Calibri" pitchFamily="34" charset="-122"/>
                 <a:cs typeface="Calibri" pitchFamily="34" charset="-120"/>
               </a:rPr>
+              <a:t>Lets them pass through without changing direction</a:t>
+            </a:r>
+            <a:endParaRPr lang="en-US" sz="2000" dirty="0"/>
+          </a:p>
+          <a:p>
+            <a:pPr algn="l" indent="0" marL="0">
+              <a:spcAft>
+                <a:spcPts val="600"/>
+              </a:spcAft>
+              <a:buNone/>
+            </a:pPr>
+            <a:r>
+              <a:rPr lang="en-US" sz="2000" b="1" dirty="0">
+                <a:solidFill>
+                  <a:srgbClr val="B8862B"/>
+                </a:solidFill>
+                <a:latin typeface="Calibri" pitchFamily="34" charset="0"/>
+                <a:ea typeface="Calibri" pitchFamily="34" charset="-122"/>
+                <a:cs typeface="Calibri" pitchFamily="34" charset="-120"/>
+              </a:rPr>
+              <a:t>C   </a:t>
+            </a:r>
+            <a:pPr algn="l" indent="0" marL="0">
+              <a:spcAft>
+                <a:spcPts val="600"/>
+              </a:spcAft>
+              <a:buNone/>
+            </a:pPr>
+            <a:r>
+              <a:rPr lang="en-US" sz="2000" dirty="0">
+                <a:solidFill>
+                  <a:srgbClr val="1E2229"/>
+                </a:solidFill>
+                <a:latin typeface="Calibri" pitchFamily="34" charset="0"/>
+                <a:ea typeface="Calibri" pitchFamily="34" charset="-122"/>
+                <a:cs typeface="Calibri" pitchFamily="34" charset="-120"/>
+              </a:rPr>
               <a:t>Spreads them out as if they came from the principal focus</a:t>
             </a:r>
-            <a:endParaRPr lang="en-US" sz="2200" dirty="0"/>
+            <a:endParaRPr lang="en-US" sz="2000" dirty="0"/>
           </a:p>
           <a:p>
             <a:pPr algn="l" indent="0" marL="0">
               <a:spcAft>
-                <a:spcPts val="200"/>
+                <a:spcPts val="600"/>
               </a:spcAft>
               <a:buNone/>
             </a:pPr>
             <a:r>
-              <a:rPr lang="en-US" sz="2200" b="1" dirty="0">
+              <a:rPr lang="en-US" sz="2000" b="1" dirty="0">
                 <a:solidFill>
                   <a:srgbClr val="B8862B"/>
                 </a:solidFill>
@@ -11776,16 +11813,16 @@
                 <a:ea typeface="Calibri" pitchFamily="34" charset="-122"/>
                 <a:cs typeface="Calibri" pitchFamily="34" charset="-120"/>
               </a:rPr>
-              <a:t>C   </a:t>
+              <a:t>D   </a:t>
             </a:r>
             <a:pPr algn="l" indent="0" marL="0">
               <a:spcAft>
-                <a:spcPts val="200"/>
+                <a:spcPts val="600"/>
               </a:spcAft>
               <a:buNone/>
             </a:pPr>
             <a:r>
-              <a:rPr lang="en-US" sz="2200" dirty="0">
+              <a:rPr lang="en-US" sz="2000" dirty="0">
                 <a:solidFill>
                   <a:srgbClr val="1E2229"/>
                 </a:solidFill>
@@ -11795,44 +11832,7 @@
               </a:rPr>
               <a:t>Reflects them back the way they came</a:t>
             </a:r>
-            <a:endParaRPr lang="en-US" sz="2200" dirty="0"/>
-          </a:p>
-          <a:p>
-            <a:pPr algn="l" indent="0" marL="0">
-              <a:spcAft>
-                <a:spcPts val="200"/>
-              </a:spcAft>
-              <a:buNone/>
-            </a:pPr>
-            <a:r>
-              <a:rPr lang="en-US" sz="2200" b="1" dirty="0">
-                <a:solidFill>
-                  <a:srgbClr val="B8862B"/>
-                </a:solidFill>
-                <a:latin typeface="Calibri" pitchFamily="34" charset="0"/>
-                <a:ea typeface="Calibri" pitchFamily="34" charset="-122"/>
-                <a:cs typeface="Calibri" pitchFamily="34" charset="-120"/>
-              </a:rPr>
-              <a:t>D   </a:t>
-            </a:r>
-            <a:pPr algn="l" indent="0" marL="0">
-              <a:spcAft>
-                <a:spcPts val="200"/>
-              </a:spcAft>
-              <a:buNone/>
-            </a:pPr>
-            <a:r>
-              <a:rPr lang="en-US" sz="2200" dirty="0">
-                <a:solidFill>
-                  <a:srgbClr val="1E2229"/>
-                </a:solidFill>
-                <a:latin typeface="Calibri" pitchFamily="34" charset="0"/>
-                <a:ea typeface="Calibri" pitchFamily="34" charset="-122"/>
-                <a:cs typeface="Calibri" pitchFamily="34" charset="-120"/>
-              </a:rPr>
-              <a:t>Lets them pass through without changing direction</a:t>
-            </a:r>
-            <a:endParaRPr lang="en-US" sz="2200" dirty="0"/>
+            <a:endParaRPr lang="en-US" sz="2000" dirty="0"/>
           </a:p>
         </p:txBody>
       </p:sp>
@@ -12232,7 +12232,7 @@
                 <a:ea typeface="Calibri" pitchFamily="34" charset="-122"/>
                 <a:cs typeface="Calibri" pitchFamily="34" charset="-120"/>
               </a:rPr>
-              <a:t>Always a virtual image</a:t>
+              <a:t>A real image if the object is far away</a:t>
             </a:r>
             <a:endParaRPr lang="en-US" sz="1800" dirty="0"/>
           </a:p>
@@ -12306,7 +12306,7 @@
                 <a:ea typeface="Calibri" pitchFamily="34" charset="-122"/>
                 <a:cs typeface="Calibri" pitchFamily="34" charset="-120"/>
               </a:rPr>
-              <a:t>A real image if the object is far away</a:t>
+              <a:t>A real image if the object is close</a:t>
             </a:r>
             <a:endParaRPr lang="en-US" sz="1800" dirty="0"/>
           </a:p>
@@ -12343,7 +12343,7 @@
                 <a:ea typeface="Calibri" pitchFamily="34" charset="-122"/>
                 <a:cs typeface="Calibri" pitchFamily="34" charset="-120"/>
               </a:rPr>
-              <a:t>A real image if the object is close</a:t>
+              <a:t>Always a virtual image</a:t>
             </a:r>
             <a:endParaRPr lang="en-US" sz="1800" dirty="0"/>
           </a:p>
@@ -13683,7 +13683,7 @@
                 <a:ea typeface="Calibri" pitchFamily="34" charset="-122"/>
                 <a:cs typeface="Calibri" pitchFamily="34" charset="-120"/>
               </a:rPr>
-              <a:t>A   Always a virtual image</a:t>
+              <a:t>D   Always a virtual image</a:t>
             </a:r>
             <a:endParaRPr lang="en-US" sz="2200" dirty="0"/>
           </a:p>

--- a/decks/triple-light/triple-light_ch4_lenses.pptx
+++ b/decks/triple-light/triple-light_ch4_lenses.pptx
@@ -126,30 +126,30 @@
   <p:extLst>
     <p:ext uri="{521415D9-36F7-43E2-AB2F-B90AF26B5E84}">
       <p14:sectionLst xmlns:p14="http://schemas.microsoft.com/office/powerpoint/2010/main">
-        <p14:section name="Opening" id="{fb54dadf-0dbe-2141-946f-a114794004ed}">
+        <p14:section name="Opening" id="{744cc442-40cf-42bd-39a8-50a845e43851}">
           <p14:sldIdLst>
             <p14:sldId id="256"/>
           </p14:sldIdLst>
         </p14:section>
-        <p14:section name="Gate" id="{3b435172-897b-d379-e9f2-32669e1aea92}">
+        <p14:section name="Gate" id="{1217cc31-c85d-551d-ac6c-bcfe7bd6e9ae}">
           <p14:sldIdLst>
             <p14:sldId id="257"/>
             <p14:sldId id="258"/>
           </p14:sldIdLst>
         </p14:section>
-        <p14:section name="Pre-teach" id="{1db9687e-49a0-07de-4bd3-ba28ba6e02db}">
+        <p14:section name="Pre-teach" id="{f45e5097-7f83-bdfb-709d-6ff2df2e02ed}">
           <p14:sldIdLst>
             <p14:sldId id="259"/>
             <p14:sldId id="260"/>
           </p14:sldIdLst>
         </p14:section>
-        <p14:section name="Read-along" id="{a1f21849-54a7-b2db-7423-3d474139059c}">
+        <p14:section name="Read-along" id="{6c096768-0cfb-800c-da71-291ac8765287}">
           <p14:sldIdLst>
             <p14:sldId id="261"/>
             <p14:sldId id="262"/>
           </p14:sldIdLst>
         </p14:section>
-        <p14:section name="Teach" id="{927f23c8-a79a-b5ee-cb6a-86dd08dd9aad}">
+        <p14:section name="Teach" id="{9c9180d2-7d4b-0556-b854-c95a1355a04f}">
           <p14:sldIdLst>
             <p14:sldId id="263"/>
             <p14:sldId id="264"/>
@@ -158,7 +158,7 @@
             <p14:sldId id="267"/>
           </p14:sldIdLst>
         </p14:section>
-        <p14:section name="Routes" id="{c131860b-cec4-8434-1b77-8be311ab8368}">
+        <p14:section name="Routes" id="{f234d07f-314e-4d0e-b51d-1b5ea198cb3c}">
           <p14:sldIdLst>
             <p14:sldId id="268"/>
             <p14:sldId id="269"/>
@@ -166,12 +166,12 @@
             <p14:sldId id="271"/>
           </p14:sldIdLst>
         </p14:section>
-        <p14:section name="Close" id="{f9085560-89df-872a-c292-92c28c703acf}">
+        <p14:section name="Close" id="{b8794a9c-f346-ce8f-6e87-75f810e1a013}">
           <p14:sldIdLst>
             <p14:sldId id="272"/>
           </p14:sldIdLst>
         </p14:section>
-        <p14:section name="Answers" id="{a4d1056b-7f90-bbbc-5377-bf8f021e6c59}">
+        <p14:section name="Answers" id="{44e08862-4df8-028f-8606-40fd464852c9}">
           <p14:sldIdLst>
             <p14:sldId id="273"/>
             <p14:sldId id="274"/>
